--- a/public/videos/repositories/prize-stock-alert/prize-stock-alert-tech-preview.pptx
+++ b/public/videos/repositories/prize-stock-alert/prize-stock-alert-tech-preview.pptx
@@ -134,7 +134,7 @@
           <p:cNvPr id="2" name="タイトル 1">
             <a:extLst>
               <a:ext uri="{FF2B5EF4-FFF2-40B4-BE49-F238E27FC236}">
-                <a16:creationId xmlns:a16="http://schemas.microsoft.com/office/drawing/2014/main" id="{A89614B2-5085-EDF1-E037-F237B27EE9D3}"/>
+                <a16:creationId xmlns:a16="http://schemas.microsoft.com/office/drawing/2014/main" id="{DDD837B3-CD8E-D15B-F808-0D9693A88E67}"/>
               </a:ext>
             </a:extLst>
           </p:cNvPr>
@@ -171,7 +171,7 @@
           <p:cNvPr id="3" name="字幕 2">
             <a:extLst>
               <a:ext uri="{FF2B5EF4-FFF2-40B4-BE49-F238E27FC236}">
-                <a16:creationId xmlns:a16="http://schemas.microsoft.com/office/drawing/2014/main" id="{A3EEBE92-F5B9-F309-6ADC-C9AB3A338517}"/>
+                <a16:creationId xmlns:a16="http://schemas.microsoft.com/office/drawing/2014/main" id="{9440CE77-C096-56CF-43CC-8CBA1B57EB97}"/>
               </a:ext>
             </a:extLst>
           </p:cNvPr>
@@ -241,7 +241,7 @@
           <p:cNvPr id="4" name="日付プレースホルダー 3">
             <a:extLst>
               <a:ext uri="{FF2B5EF4-FFF2-40B4-BE49-F238E27FC236}">
-                <a16:creationId xmlns:a16="http://schemas.microsoft.com/office/drawing/2014/main" id="{E09DDE8F-95A5-D999-55E3-8CA0661005EE}"/>
+                <a16:creationId xmlns:a16="http://schemas.microsoft.com/office/drawing/2014/main" id="{6B0F50C0-C078-9FB0-D8EA-2DB2B0516A1B}"/>
               </a:ext>
             </a:extLst>
           </p:cNvPr>
@@ -257,7 +257,7 @@
           <a:bodyPr/>
           <a:lstStyle/>
           <a:p>
-            <a:fld id="{2BA13DB1-F98E-4CB7-8E3C-022B5CE5E477}" type="datetimeFigureOut">
+            <a:fld id="{AD7249F9-574B-47D7-9E89-11B34E8CE952}" type="datetimeFigureOut">
               <a:rPr kumimoji="1" lang="ja-JP" altLang="en-US" smtClean="0"/>
               <a:t>2026/7/30</a:t>
             </a:fld>
@@ -270,7 +270,7 @@
           <p:cNvPr id="5" name="フッター プレースホルダー 4">
             <a:extLst>
               <a:ext uri="{FF2B5EF4-FFF2-40B4-BE49-F238E27FC236}">
-                <a16:creationId xmlns:a16="http://schemas.microsoft.com/office/drawing/2014/main" id="{9B0C0E34-B054-CB15-B1F8-964ED855806B}"/>
+                <a16:creationId xmlns:a16="http://schemas.microsoft.com/office/drawing/2014/main" id="{295CD20A-F556-3E2A-225E-6486E851B930}"/>
               </a:ext>
             </a:extLst>
           </p:cNvPr>
@@ -295,7 +295,7 @@
           <p:cNvPr id="6" name="スライド番号プレースホルダー 5">
             <a:extLst>
               <a:ext uri="{FF2B5EF4-FFF2-40B4-BE49-F238E27FC236}">
-                <a16:creationId xmlns:a16="http://schemas.microsoft.com/office/drawing/2014/main" id="{358B2D30-437C-CC33-A19F-B14BDA28C4CF}"/>
+                <a16:creationId xmlns:a16="http://schemas.microsoft.com/office/drawing/2014/main" id="{945ED398-CB2A-A37F-9938-372373C25243}"/>
               </a:ext>
             </a:extLst>
           </p:cNvPr>
@@ -311,7 +311,7 @@
           <a:bodyPr/>
           <a:lstStyle/>
           <a:p>
-            <a:fld id="{921E9C66-043B-4641-BE1D-DB0300241785}" type="slidenum">
+            <a:fld id="{2424C583-414A-4C59-9A3C-B49240DB116E}" type="slidenum">
               <a:rPr kumimoji="1" lang="ja-JP" altLang="en-US" smtClean="0"/>
               <a:t>‹#›</a:t>
             </a:fld>
@@ -322,7 +322,7 @@
     </p:spTree>
     <p:extLst>
       <p:ext uri="{BB962C8B-B14F-4D97-AF65-F5344CB8AC3E}">
-        <p14:creationId xmlns:p14="http://schemas.microsoft.com/office/powerpoint/2010/main" val="551384078"/>
+        <p14:creationId xmlns:p14="http://schemas.microsoft.com/office/powerpoint/2010/main" val="952191948"/>
       </p:ext>
     </p:extLst>
   </p:cSld>
@@ -354,7 +354,7 @@
           <p:cNvPr id="2" name="タイトル 1">
             <a:extLst>
               <a:ext uri="{FF2B5EF4-FFF2-40B4-BE49-F238E27FC236}">
-                <a16:creationId xmlns:a16="http://schemas.microsoft.com/office/drawing/2014/main" id="{74E8B744-7712-E4F7-3A66-6754CE6E6A5A}"/>
+                <a16:creationId xmlns:a16="http://schemas.microsoft.com/office/drawing/2014/main" id="{01832C20-0F9F-A5EE-FD0B-B5B1CA61B5E3}"/>
               </a:ext>
             </a:extLst>
           </p:cNvPr>
@@ -382,7 +382,7 @@
           <p:cNvPr id="3" name="縦書きテキスト プレースホルダー 2">
             <a:extLst>
               <a:ext uri="{FF2B5EF4-FFF2-40B4-BE49-F238E27FC236}">
-                <a16:creationId xmlns:a16="http://schemas.microsoft.com/office/drawing/2014/main" id="{B6FCC9C0-389F-29EC-72EC-89C821AFA724}"/>
+                <a16:creationId xmlns:a16="http://schemas.microsoft.com/office/drawing/2014/main" id="{E1A4A060-3DC3-AC6B-5027-D49F03561875}"/>
               </a:ext>
             </a:extLst>
           </p:cNvPr>
@@ -471,7 +471,7 @@
           <p:cNvPr id="4" name="日付プレースホルダー 3">
             <a:extLst>
               <a:ext uri="{FF2B5EF4-FFF2-40B4-BE49-F238E27FC236}">
-                <a16:creationId xmlns:a16="http://schemas.microsoft.com/office/drawing/2014/main" id="{1BAA13AD-9545-6525-0799-AF9AF792BA0A}"/>
+                <a16:creationId xmlns:a16="http://schemas.microsoft.com/office/drawing/2014/main" id="{91996322-3804-C729-B93B-B14726AA2480}"/>
               </a:ext>
             </a:extLst>
           </p:cNvPr>
@@ -487,7 +487,7 @@
           <a:bodyPr/>
           <a:lstStyle/>
           <a:p>
-            <a:fld id="{2BA13DB1-F98E-4CB7-8E3C-022B5CE5E477}" type="datetimeFigureOut">
+            <a:fld id="{AD7249F9-574B-47D7-9E89-11B34E8CE952}" type="datetimeFigureOut">
               <a:rPr kumimoji="1" lang="ja-JP" altLang="en-US" smtClean="0"/>
               <a:t>2026/7/30</a:t>
             </a:fld>
@@ -500,7 +500,7 @@
           <p:cNvPr id="5" name="フッター プレースホルダー 4">
             <a:extLst>
               <a:ext uri="{FF2B5EF4-FFF2-40B4-BE49-F238E27FC236}">
-                <a16:creationId xmlns:a16="http://schemas.microsoft.com/office/drawing/2014/main" id="{F3748ACF-C908-2F63-1F7F-8249A0857DA6}"/>
+                <a16:creationId xmlns:a16="http://schemas.microsoft.com/office/drawing/2014/main" id="{8C909F15-E28E-BC2A-1301-1A36094F6545}"/>
               </a:ext>
             </a:extLst>
           </p:cNvPr>
@@ -525,7 +525,7 @@
           <p:cNvPr id="6" name="スライド番号プレースホルダー 5">
             <a:extLst>
               <a:ext uri="{FF2B5EF4-FFF2-40B4-BE49-F238E27FC236}">
-                <a16:creationId xmlns:a16="http://schemas.microsoft.com/office/drawing/2014/main" id="{F916D558-5393-35BB-E3CF-C427A0807905}"/>
+                <a16:creationId xmlns:a16="http://schemas.microsoft.com/office/drawing/2014/main" id="{CB8E4187-FA66-578B-A325-963C54149514}"/>
               </a:ext>
             </a:extLst>
           </p:cNvPr>
@@ -541,7 +541,7 @@
           <a:bodyPr/>
           <a:lstStyle/>
           <a:p>
-            <a:fld id="{921E9C66-043B-4641-BE1D-DB0300241785}" type="slidenum">
+            <a:fld id="{2424C583-414A-4C59-9A3C-B49240DB116E}" type="slidenum">
               <a:rPr kumimoji="1" lang="ja-JP" altLang="en-US" smtClean="0"/>
               <a:t>‹#›</a:t>
             </a:fld>
@@ -552,7 +552,7 @@
     </p:spTree>
     <p:extLst>
       <p:ext uri="{BB962C8B-B14F-4D97-AF65-F5344CB8AC3E}">
-        <p14:creationId xmlns:p14="http://schemas.microsoft.com/office/powerpoint/2010/main" val="408565179"/>
+        <p14:creationId xmlns:p14="http://schemas.microsoft.com/office/powerpoint/2010/main" val="1827452339"/>
       </p:ext>
     </p:extLst>
   </p:cSld>
@@ -584,7 +584,7 @@
           <p:cNvPr id="2" name="縦書きタイトル 1">
             <a:extLst>
               <a:ext uri="{FF2B5EF4-FFF2-40B4-BE49-F238E27FC236}">
-                <a16:creationId xmlns:a16="http://schemas.microsoft.com/office/drawing/2014/main" id="{98EF59B4-963C-251F-57D4-526C9E3743F0}"/>
+                <a16:creationId xmlns:a16="http://schemas.microsoft.com/office/drawing/2014/main" id="{664D7F2D-01EA-D3F9-F986-F1B0E24B03ED}"/>
               </a:ext>
             </a:extLst>
           </p:cNvPr>
@@ -617,7 +617,7 @@
           <p:cNvPr id="3" name="縦書きテキスト プレースホルダー 2">
             <a:extLst>
               <a:ext uri="{FF2B5EF4-FFF2-40B4-BE49-F238E27FC236}">
-                <a16:creationId xmlns:a16="http://schemas.microsoft.com/office/drawing/2014/main" id="{238796E6-9A8A-D474-FDF2-70E4DB8355AA}"/>
+                <a16:creationId xmlns:a16="http://schemas.microsoft.com/office/drawing/2014/main" id="{DFFEDDBA-874E-4168-5D4D-559D09B91297}"/>
               </a:ext>
             </a:extLst>
           </p:cNvPr>
@@ -711,7 +711,7 @@
           <p:cNvPr id="4" name="日付プレースホルダー 3">
             <a:extLst>
               <a:ext uri="{FF2B5EF4-FFF2-40B4-BE49-F238E27FC236}">
-                <a16:creationId xmlns:a16="http://schemas.microsoft.com/office/drawing/2014/main" id="{C1301277-756A-DBFF-BC94-D2242050DB2A}"/>
+                <a16:creationId xmlns:a16="http://schemas.microsoft.com/office/drawing/2014/main" id="{0A4840C7-BDF0-F2F1-C97C-CE3674781057}"/>
               </a:ext>
             </a:extLst>
           </p:cNvPr>
@@ -727,7 +727,7 @@
           <a:bodyPr/>
           <a:lstStyle/>
           <a:p>
-            <a:fld id="{2BA13DB1-F98E-4CB7-8E3C-022B5CE5E477}" type="datetimeFigureOut">
+            <a:fld id="{AD7249F9-574B-47D7-9E89-11B34E8CE952}" type="datetimeFigureOut">
               <a:rPr kumimoji="1" lang="ja-JP" altLang="en-US" smtClean="0"/>
               <a:t>2026/7/30</a:t>
             </a:fld>
@@ -740,7 +740,7 @@
           <p:cNvPr id="5" name="フッター プレースホルダー 4">
             <a:extLst>
               <a:ext uri="{FF2B5EF4-FFF2-40B4-BE49-F238E27FC236}">
-                <a16:creationId xmlns:a16="http://schemas.microsoft.com/office/drawing/2014/main" id="{9DCA17B9-285C-BFC6-CE57-F9C6287AE832}"/>
+                <a16:creationId xmlns:a16="http://schemas.microsoft.com/office/drawing/2014/main" id="{F357BA83-A17B-6826-BF4C-10336139D571}"/>
               </a:ext>
             </a:extLst>
           </p:cNvPr>
@@ -765,7 +765,7 @@
           <p:cNvPr id="6" name="スライド番号プレースホルダー 5">
             <a:extLst>
               <a:ext uri="{FF2B5EF4-FFF2-40B4-BE49-F238E27FC236}">
-                <a16:creationId xmlns:a16="http://schemas.microsoft.com/office/drawing/2014/main" id="{13F69391-25A2-A124-B892-C35715F9DF12}"/>
+                <a16:creationId xmlns:a16="http://schemas.microsoft.com/office/drawing/2014/main" id="{5D4EF23B-8256-02F0-B3EF-EACE16034924}"/>
               </a:ext>
             </a:extLst>
           </p:cNvPr>
@@ -781,7 +781,7 @@
           <a:bodyPr/>
           <a:lstStyle/>
           <a:p>
-            <a:fld id="{921E9C66-043B-4641-BE1D-DB0300241785}" type="slidenum">
+            <a:fld id="{2424C583-414A-4C59-9A3C-B49240DB116E}" type="slidenum">
               <a:rPr kumimoji="1" lang="ja-JP" altLang="en-US" smtClean="0"/>
               <a:t>‹#›</a:t>
             </a:fld>
@@ -792,7 +792,7 @@
     </p:spTree>
     <p:extLst>
       <p:ext uri="{BB962C8B-B14F-4D97-AF65-F5344CB8AC3E}">
-        <p14:creationId xmlns:p14="http://schemas.microsoft.com/office/powerpoint/2010/main" val="2442039156"/>
+        <p14:creationId xmlns:p14="http://schemas.microsoft.com/office/powerpoint/2010/main" val="2731579949"/>
       </p:ext>
     </p:extLst>
   </p:cSld>
@@ -824,7 +824,7 @@
           <p:cNvPr id="2" name="タイトル 1">
             <a:extLst>
               <a:ext uri="{FF2B5EF4-FFF2-40B4-BE49-F238E27FC236}">
-                <a16:creationId xmlns:a16="http://schemas.microsoft.com/office/drawing/2014/main" id="{B49EE4D9-B009-8BE5-6751-F53126F53AFA}"/>
+                <a16:creationId xmlns:a16="http://schemas.microsoft.com/office/drawing/2014/main" id="{1649224D-7E64-C772-4A6B-EB0A141F08A4}"/>
               </a:ext>
             </a:extLst>
           </p:cNvPr>
@@ -852,7 +852,7 @@
           <p:cNvPr id="3" name="コンテンツ プレースホルダー 2">
             <a:extLst>
               <a:ext uri="{FF2B5EF4-FFF2-40B4-BE49-F238E27FC236}">
-                <a16:creationId xmlns:a16="http://schemas.microsoft.com/office/drawing/2014/main" id="{87D3DA91-2D7F-7765-FB9E-7F1037CBDCBE}"/>
+                <a16:creationId xmlns:a16="http://schemas.microsoft.com/office/drawing/2014/main" id="{CDCBA649-AF13-853B-3F7D-31D94F35E7BB}"/>
               </a:ext>
             </a:extLst>
           </p:cNvPr>
@@ -941,7 +941,7 @@
           <p:cNvPr id="4" name="日付プレースホルダー 3">
             <a:extLst>
               <a:ext uri="{FF2B5EF4-FFF2-40B4-BE49-F238E27FC236}">
-                <a16:creationId xmlns:a16="http://schemas.microsoft.com/office/drawing/2014/main" id="{23B5D391-205B-295F-5FBB-3360A5A2A220}"/>
+                <a16:creationId xmlns:a16="http://schemas.microsoft.com/office/drawing/2014/main" id="{FC07A8DF-CE2B-31B0-5122-0AA8221735C0}"/>
               </a:ext>
             </a:extLst>
           </p:cNvPr>
@@ -957,7 +957,7 @@
           <a:bodyPr/>
           <a:lstStyle/>
           <a:p>
-            <a:fld id="{2BA13DB1-F98E-4CB7-8E3C-022B5CE5E477}" type="datetimeFigureOut">
+            <a:fld id="{AD7249F9-574B-47D7-9E89-11B34E8CE952}" type="datetimeFigureOut">
               <a:rPr kumimoji="1" lang="ja-JP" altLang="en-US" smtClean="0"/>
               <a:t>2026/7/30</a:t>
             </a:fld>
@@ -970,7 +970,7 @@
           <p:cNvPr id="5" name="フッター プレースホルダー 4">
             <a:extLst>
               <a:ext uri="{FF2B5EF4-FFF2-40B4-BE49-F238E27FC236}">
-                <a16:creationId xmlns:a16="http://schemas.microsoft.com/office/drawing/2014/main" id="{C1980E60-8EF8-CC00-6D2F-795A65913C78}"/>
+                <a16:creationId xmlns:a16="http://schemas.microsoft.com/office/drawing/2014/main" id="{0E88D951-9802-EB11-2ADD-F3A97EA06AF7}"/>
               </a:ext>
             </a:extLst>
           </p:cNvPr>
@@ -995,7 +995,7 @@
           <p:cNvPr id="6" name="スライド番号プレースホルダー 5">
             <a:extLst>
               <a:ext uri="{FF2B5EF4-FFF2-40B4-BE49-F238E27FC236}">
-                <a16:creationId xmlns:a16="http://schemas.microsoft.com/office/drawing/2014/main" id="{DE0C2FDF-C060-DE1A-9AA6-EBAF3E543EC6}"/>
+                <a16:creationId xmlns:a16="http://schemas.microsoft.com/office/drawing/2014/main" id="{D9164E7C-6C18-FA34-8743-722F17AB8C96}"/>
               </a:ext>
             </a:extLst>
           </p:cNvPr>
@@ -1011,7 +1011,7 @@
           <a:bodyPr/>
           <a:lstStyle/>
           <a:p>
-            <a:fld id="{921E9C66-043B-4641-BE1D-DB0300241785}" type="slidenum">
+            <a:fld id="{2424C583-414A-4C59-9A3C-B49240DB116E}" type="slidenum">
               <a:rPr kumimoji="1" lang="ja-JP" altLang="en-US" smtClean="0"/>
               <a:t>‹#›</a:t>
             </a:fld>
@@ -1022,7 +1022,7 @@
     </p:spTree>
     <p:extLst>
       <p:ext uri="{BB962C8B-B14F-4D97-AF65-F5344CB8AC3E}">
-        <p14:creationId xmlns:p14="http://schemas.microsoft.com/office/powerpoint/2010/main" val="2648706157"/>
+        <p14:creationId xmlns:p14="http://schemas.microsoft.com/office/powerpoint/2010/main" val="228305730"/>
       </p:ext>
     </p:extLst>
   </p:cSld>
@@ -1054,7 +1054,7 @@
           <p:cNvPr id="2" name="タイトル 1">
             <a:extLst>
               <a:ext uri="{FF2B5EF4-FFF2-40B4-BE49-F238E27FC236}">
-                <a16:creationId xmlns:a16="http://schemas.microsoft.com/office/drawing/2014/main" id="{1E501B8B-F26D-F39E-890A-841E425E7D3A}"/>
+                <a16:creationId xmlns:a16="http://schemas.microsoft.com/office/drawing/2014/main" id="{D8EED3F7-295C-0512-D6AC-4295B0F35E3A}"/>
               </a:ext>
             </a:extLst>
           </p:cNvPr>
@@ -1091,7 +1091,7 @@
           <p:cNvPr id="3" name="テキスト プレースホルダー 2">
             <a:extLst>
               <a:ext uri="{FF2B5EF4-FFF2-40B4-BE49-F238E27FC236}">
-                <a16:creationId xmlns:a16="http://schemas.microsoft.com/office/drawing/2014/main" id="{10AD44ED-E3E8-780A-6904-956F527B5EBF}"/>
+                <a16:creationId xmlns:a16="http://schemas.microsoft.com/office/drawing/2014/main" id="{63DE976F-B5EA-CBF8-6740-F32D17B6E445}"/>
               </a:ext>
             </a:extLst>
           </p:cNvPr>
@@ -1216,7 +1216,7 @@
           <p:cNvPr id="4" name="日付プレースホルダー 3">
             <a:extLst>
               <a:ext uri="{FF2B5EF4-FFF2-40B4-BE49-F238E27FC236}">
-                <a16:creationId xmlns:a16="http://schemas.microsoft.com/office/drawing/2014/main" id="{F49F72AF-A8BB-F249-5A95-9C32362E84F2}"/>
+                <a16:creationId xmlns:a16="http://schemas.microsoft.com/office/drawing/2014/main" id="{3C1EBC7E-0330-B6FF-BAFC-4B5287566E18}"/>
               </a:ext>
             </a:extLst>
           </p:cNvPr>
@@ -1232,7 +1232,7 @@
           <a:bodyPr/>
           <a:lstStyle/>
           <a:p>
-            <a:fld id="{2BA13DB1-F98E-4CB7-8E3C-022B5CE5E477}" type="datetimeFigureOut">
+            <a:fld id="{AD7249F9-574B-47D7-9E89-11B34E8CE952}" type="datetimeFigureOut">
               <a:rPr kumimoji="1" lang="ja-JP" altLang="en-US" smtClean="0"/>
               <a:t>2026/7/30</a:t>
             </a:fld>
@@ -1245,7 +1245,7 @@
           <p:cNvPr id="5" name="フッター プレースホルダー 4">
             <a:extLst>
               <a:ext uri="{FF2B5EF4-FFF2-40B4-BE49-F238E27FC236}">
-                <a16:creationId xmlns:a16="http://schemas.microsoft.com/office/drawing/2014/main" id="{5281D9B2-114E-EE5B-C701-C5350F997F4B}"/>
+                <a16:creationId xmlns:a16="http://schemas.microsoft.com/office/drawing/2014/main" id="{59CA502E-35BA-5E50-DB08-3318FC592BEF}"/>
               </a:ext>
             </a:extLst>
           </p:cNvPr>
@@ -1270,7 +1270,7 @@
           <p:cNvPr id="6" name="スライド番号プレースホルダー 5">
             <a:extLst>
               <a:ext uri="{FF2B5EF4-FFF2-40B4-BE49-F238E27FC236}">
-                <a16:creationId xmlns:a16="http://schemas.microsoft.com/office/drawing/2014/main" id="{3657CE53-217D-8E28-BC83-1989345FEF3A}"/>
+                <a16:creationId xmlns:a16="http://schemas.microsoft.com/office/drawing/2014/main" id="{713AA5B4-CE38-8AD9-845B-F074D781456B}"/>
               </a:ext>
             </a:extLst>
           </p:cNvPr>
@@ -1286,7 +1286,7 @@
           <a:bodyPr/>
           <a:lstStyle/>
           <a:p>
-            <a:fld id="{921E9C66-043B-4641-BE1D-DB0300241785}" type="slidenum">
+            <a:fld id="{2424C583-414A-4C59-9A3C-B49240DB116E}" type="slidenum">
               <a:rPr kumimoji="1" lang="ja-JP" altLang="en-US" smtClean="0"/>
               <a:t>‹#›</a:t>
             </a:fld>
@@ -1297,7 +1297,7 @@
     </p:spTree>
     <p:extLst>
       <p:ext uri="{BB962C8B-B14F-4D97-AF65-F5344CB8AC3E}">
-        <p14:creationId xmlns:p14="http://schemas.microsoft.com/office/powerpoint/2010/main" val="159623397"/>
+        <p14:creationId xmlns:p14="http://schemas.microsoft.com/office/powerpoint/2010/main" val="1760341466"/>
       </p:ext>
     </p:extLst>
   </p:cSld>
@@ -1329,7 +1329,7 @@
           <p:cNvPr id="2" name="タイトル 1">
             <a:extLst>
               <a:ext uri="{FF2B5EF4-FFF2-40B4-BE49-F238E27FC236}">
-                <a16:creationId xmlns:a16="http://schemas.microsoft.com/office/drawing/2014/main" id="{4B560AD2-4619-63A5-EE42-9302FF5A2725}"/>
+                <a16:creationId xmlns:a16="http://schemas.microsoft.com/office/drawing/2014/main" id="{0DB7A88C-1618-6D32-FDBC-6AC97E080BF5}"/>
               </a:ext>
             </a:extLst>
           </p:cNvPr>
@@ -1357,7 +1357,7 @@
           <p:cNvPr id="3" name="コンテンツ プレースホルダー 2">
             <a:extLst>
               <a:ext uri="{FF2B5EF4-FFF2-40B4-BE49-F238E27FC236}">
-                <a16:creationId xmlns:a16="http://schemas.microsoft.com/office/drawing/2014/main" id="{72F21467-9A5B-AF13-63B3-BA6A8D6C252B}"/>
+                <a16:creationId xmlns:a16="http://schemas.microsoft.com/office/drawing/2014/main" id="{CC0A2725-3C03-B353-6F05-CFC796431B10}"/>
               </a:ext>
             </a:extLst>
           </p:cNvPr>
@@ -1451,7 +1451,7 @@
           <p:cNvPr id="4" name="コンテンツ プレースホルダー 3">
             <a:extLst>
               <a:ext uri="{FF2B5EF4-FFF2-40B4-BE49-F238E27FC236}">
-                <a16:creationId xmlns:a16="http://schemas.microsoft.com/office/drawing/2014/main" id="{62D3FF06-17AD-A5FF-9C4B-135DB97DC7CE}"/>
+                <a16:creationId xmlns:a16="http://schemas.microsoft.com/office/drawing/2014/main" id="{C6A36138-BB7B-1A26-7188-4EE69315E96B}"/>
               </a:ext>
             </a:extLst>
           </p:cNvPr>
@@ -1545,7 +1545,7 @@
           <p:cNvPr id="5" name="日付プレースホルダー 4">
             <a:extLst>
               <a:ext uri="{FF2B5EF4-FFF2-40B4-BE49-F238E27FC236}">
-                <a16:creationId xmlns:a16="http://schemas.microsoft.com/office/drawing/2014/main" id="{1E63F198-4C4C-A636-D212-EEEF6F0FF0F0}"/>
+                <a16:creationId xmlns:a16="http://schemas.microsoft.com/office/drawing/2014/main" id="{C9EBEF82-ACFF-3336-C700-65401FC176A7}"/>
               </a:ext>
             </a:extLst>
           </p:cNvPr>
@@ -1561,7 +1561,7 @@
           <a:bodyPr/>
           <a:lstStyle/>
           <a:p>
-            <a:fld id="{2BA13DB1-F98E-4CB7-8E3C-022B5CE5E477}" type="datetimeFigureOut">
+            <a:fld id="{AD7249F9-574B-47D7-9E89-11B34E8CE952}" type="datetimeFigureOut">
               <a:rPr kumimoji="1" lang="ja-JP" altLang="en-US" smtClean="0"/>
               <a:t>2026/7/30</a:t>
             </a:fld>
@@ -1574,7 +1574,7 @@
           <p:cNvPr id="6" name="フッター プレースホルダー 5">
             <a:extLst>
               <a:ext uri="{FF2B5EF4-FFF2-40B4-BE49-F238E27FC236}">
-                <a16:creationId xmlns:a16="http://schemas.microsoft.com/office/drawing/2014/main" id="{581F5233-E6E6-7552-7D92-A97237CCB7AE}"/>
+                <a16:creationId xmlns:a16="http://schemas.microsoft.com/office/drawing/2014/main" id="{5D7C4145-DD34-4AE7-049B-06B8D6D53EEE}"/>
               </a:ext>
             </a:extLst>
           </p:cNvPr>
@@ -1599,7 +1599,7 @@
           <p:cNvPr id="7" name="スライド番号プレースホルダー 6">
             <a:extLst>
               <a:ext uri="{FF2B5EF4-FFF2-40B4-BE49-F238E27FC236}">
-                <a16:creationId xmlns:a16="http://schemas.microsoft.com/office/drawing/2014/main" id="{FD977535-58BC-8194-9252-CA995602BC7A}"/>
+                <a16:creationId xmlns:a16="http://schemas.microsoft.com/office/drawing/2014/main" id="{8DDE64A1-618C-AD29-6AE1-9F83A8CD6506}"/>
               </a:ext>
             </a:extLst>
           </p:cNvPr>
@@ -1615,7 +1615,7 @@
           <a:bodyPr/>
           <a:lstStyle/>
           <a:p>
-            <a:fld id="{921E9C66-043B-4641-BE1D-DB0300241785}" type="slidenum">
+            <a:fld id="{2424C583-414A-4C59-9A3C-B49240DB116E}" type="slidenum">
               <a:rPr kumimoji="1" lang="ja-JP" altLang="en-US" smtClean="0"/>
               <a:t>‹#›</a:t>
             </a:fld>
@@ -1626,7 +1626,7 @@
     </p:spTree>
     <p:extLst>
       <p:ext uri="{BB962C8B-B14F-4D97-AF65-F5344CB8AC3E}">
-        <p14:creationId xmlns:p14="http://schemas.microsoft.com/office/powerpoint/2010/main" val="2346249118"/>
+        <p14:creationId xmlns:p14="http://schemas.microsoft.com/office/powerpoint/2010/main" val="1621236159"/>
       </p:ext>
     </p:extLst>
   </p:cSld>
@@ -1658,7 +1658,7 @@
           <p:cNvPr id="2" name="タイトル 1">
             <a:extLst>
               <a:ext uri="{FF2B5EF4-FFF2-40B4-BE49-F238E27FC236}">
-                <a16:creationId xmlns:a16="http://schemas.microsoft.com/office/drawing/2014/main" id="{A3E5690E-103F-952C-796F-DDE6F7D86E17}"/>
+                <a16:creationId xmlns:a16="http://schemas.microsoft.com/office/drawing/2014/main" id="{9BA3378A-1E40-228A-8314-8DE23E8A0262}"/>
               </a:ext>
             </a:extLst>
           </p:cNvPr>
@@ -1691,7 +1691,7 @@
           <p:cNvPr id="3" name="テキスト プレースホルダー 2">
             <a:extLst>
               <a:ext uri="{FF2B5EF4-FFF2-40B4-BE49-F238E27FC236}">
-                <a16:creationId xmlns:a16="http://schemas.microsoft.com/office/drawing/2014/main" id="{4CBFC3D2-4D83-5DFA-40C2-AE4A312B00E7}"/>
+                <a16:creationId xmlns:a16="http://schemas.microsoft.com/office/drawing/2014/main" id="{E459D284-8805-2D2C-71C4-9E47653A007C}"/>
               </a:ext>
             </a:extLst>
           </p:cNvPr>
@@ -1762,7 +1762,7 @@
           <p:cNvPr id="4" name="コンテンツ プレースホルダー 3">
             <a:extLst>
               <a:ext uri="{FF2B5EF4-FFF2-40B4-BE49-F238E27FC236}">
-                <a16:creationId xmlns:a16="http://schemas.microsoft.com/office/drawing/2014/main" id="{5F0A1F31-A226-D174-C887-1F64126C8315}"/>
+                <a16:creationId xmlns:a16="http://schemas.microsoft.com/office/drawing/2014/main" id="{67EEEC87-307D-1E7E-0E6F-ACB7F5B531A9}"/>
               </a:ext>
             </a:extLst>
           </p:cNvPr>
@@ -1856,7 +1856,7 @@
           <p:cNvPr id="5" name="テキスト プレースホルダー 4">
             <a:extLst>
               <a:ext uri="{FF2B5EF4-FFF2-40B4-BE49-F238E27FC236}">
-                <a16:creationId xmlns:a16="http://schemas.microsoft.com/office/drawing/2014/main" id="{7F0840EA-DC89-BCA2-E7C2-8DFD51771AD4}"/>
+                <a16:creationId xmlns:a16="http://schemas.microsoft.com/office/drawing/2014/main" id="{1F8F968F-1250-7F01-4499-164F0E24B33C}"/>
               </a:ext>
             </a:extLst>
           </p:cNvPr>
@@ -1927,7 +1927,7 @@
           <p:cNvPr id="6" name="コンテンツ プレースホルダー 5">
             <a:extLst>
               <a:ext uri="{FF2B5EF4-FFF2-40B4-BE49-F238E27FC236}">
-                <a16:creationId xmlns:a16="http://schemas.microsoft.com/office/drawing/2014/main" id="{5991C1D3-7220-82CC-D118-539F2D93BDCF}"/>
+                <a16:creationId xmlns:a16="http://schemas.microsoft.com/office/drawing/2014/main" id="{B21C7C50-81DB-5EC1-8960-40CBC6641678}"/>
               </a:ext>
             </a:extLst>
           </p:cNvPr>
@@ -2021,7 +2021,7 @@
           <p:cNvPr id="7" name="日付プレースホルダー 6">
             <a:extLst>
               <a:ext uri="{FF2B5EF4-FFF2-40B4-BE49-F238E27FC236}">
-                <a16:creationId xmlns:a16="http://schemas.microsoft.com/office/drawing/2014/main" id="{57B05DD1-BCA3-2095-5017-344E2AD5E353}"/>
+                <a16:creationId xmlns:a16="http://schemas.microsoft.com/office/drawing/2014/main" id="{9E649266-4909-17AA-1103-B6F85EDC5C4D}"/>
               </a:ext>
             </a:extLst>
           </p:cNvPr>
@@ -2037,7 +2037,7 @@
           <a:bodyPr/>
           <a:lstStyle/>
           <a:p>
-            <a:fld id="{2BA13DB1-F98E-4CB7-8E3C-022B5CE5E477}" type="datetimeFigureOut">
+            <a:fld id="{AD7249F9-574B-47D7-9E89-11B34E8CE952}" type="datetimeFigureOut">
               <a:rPr kumimoji="1" lang="ja-JP" altLang="en-US" smtClean="0"/>
               <a:t>2026/7/30</a:t>
             </a:fld>
@@ -2050,7 +2050,7 @@
           <p:cNvPr id="8" name="フッター プレースホルダー 7">
             <a:extLst>
               <a:ext uri="{FF2B5EF4-FFF2-40B4-BE49-F238E27FC236}">
-                <a16:creationId xmlns:a16="http://schemas.microsoft.com/office/drawing/2014/main" id="{6BC7D949-75CD-C4CC-35D9-050287A6E3AA}"/>
+                <a16:creationId xmlns:a16="http://schemas.microsoft.com/office/drawing/2014/main" id="{6228DC8A-265B-36F7-D3B5-C6C63F63E51F}"/>
               </a:ext>
             </a:extLst>
           </p:cNvPr>
@@ -2075,7 +2075,7 @@
           <p:cNvPr id="9" name="スライド番号プレースホルダー 8">
             <a:extLst>
               <a:ext uri="{FF2B5EF4-FFF2-40B4-BE49-F238E27FC236}">
-                <a16:creationId xmlns:a16="http://schemas.microsoft.com/office/drawing/2014/main" id="{A96E1D75-B0E1-46A4-0E93-7A037FD3FEEE}"/>
+                <a16:creationId xmlns:a16="http://schemas.microsoft.com/office/drawing/2014/main" id="{20C21F45-F327-008E-FD37-98D544B5A4D1}"/>
               </a:ext>
             </a:extLst>
           </p:cNvPr>
@@ -2091,7 +2091,7 @@
           <a:bodyPr/>
           <a:lstStyle/>
           <a:p>
-            <a:fld id="{921E9C66-043B-4641-BE1D-DB0300241785}" type="slidenum">
+            <a:fld id="{2424C583-414A-4C59-9A3C-B49240DB116E}" type="slidenum">
               <a:rPr kumimoji="1" lang="ja-JP" altLang="en-US" smtClean="0"/>
               <a:t>‹#›</a:t>
             </a:fld>
@@ -2102,7 +2102,7 @@
     </p:spTree>
     <p:extLst>
       <p:ext uri="{BB962C8B-B14F-4D97-AF65-F5344CB8AC3E}">
-        <p14:creationId xmlns:p14="http://schemas.microsoft.com/office/powerpoint/2010/main" val="3201500492"/>
+        <p14:creationId xmlns:p14="http://schemas.microsoft.com/office/powerpoint/2010/main" val="140405164"/>
       </p:ext>
     </p:extLst>
   </p:cSld>
@@ -2134,7 +2134,7 @@
           <p:cNvPr id="2" name="タイトル 1">
             <a:extLst>
               <a:ext uri="{FF2B5EF4-FFF2-40B4-BE49-F238E27FC236}">
-                <a16:creationId xmlns:a16="http://schemas.microsoft.com/office/drawing/2014/main" id="{AC57AC7F-F749-44B2-87F7-EBFF9693CD1F}"/>
+                <a16:creationId xmlns:a16="http://schemas.microsoft.com/office/drawing/2014/main" id="{232A5324-32E5-E68F-61E2-1FFC25EE7055}"/>
               </a:ext>
             </a:extLst>
           </p:cNvPr>
@@ -2162,7 +2162,7 @@
           <p:cNvPr id="3" name="日付プレースホルダー 2">
             <a:extLst>
               <a:ext uri="{FF2B5EF4-FFF2-40B4-BE49-F238E27FC236}">
-                <a16:creationId xmlns:a16="http://schemas.microsoft.com/office/drawing/2014/main" id="{29537754-7E39-ED19-1046-EED005C1143C}"/>
+                <a16:creationId xmlns:a16="http://schemas.microsoft.com/office/drawing/2014/main" id="{B5FB3942-7890-FBD6-0A9B-800FA9C9C6D1}"/>
               </a:ext>
             </a:extLst>
           </p:cNvPr>
@@ -2178,7 +2178,7 @@
           <a:bodyPr/>
           <a:lstStyle/>
           <a:p>
-            <a:fld id="{2BA13DB1-F98E-4CB7-8E3C-022B5CE5E477}" type="datetimeFigureOut">
+            <a:fld id="{AD7249F9-574B-47D7-9E89-11B34E8CE952}" type="datetimeFigureOut">
               <a:rPr kumimoji="1" lang="ja-JP" altLang="en-US" smtClean="0"/>
               <a:t>2026/7/30</a:t>
             </a:fld>
@@ -2191,7 +2191,7 @@
           <p:cNvPr id="4" name="フッター プレースホルダー 3">
             <a:extLst>
               <a:ext uri="{FF2B5EF4-FFF2-40B4-BE49-F238E27FC236}">
-                <a16:creationId xmlns:a16="http://schemas.microsoft.com/office/drawing/2014/main" id="{A11E544C-783C-87A6-D83F-03C2E7703D5C}"/>
+                <a16:creationId xmlns:a16="http://schemas.microsoft.com/office/drawing/2014/main" id="{F54D4256-2C97-8703-B70C-5E5520FFA4D3}"/>
               </a:ext>
             </a:extLst>
           </p:cNvPr>
@@ -2216,7 +2216,7 @@
           <p:cNvPr id="5" name="スライド番号プレースホルダー 4">
             <a:extLst>
               <a:ext uri="{FF2B5EF4-FFF2-40B4-BE49-F238E27FC236}">
-                <a16:creationId xmlns:a16="http://schemas.microsoft.com/office/drawing/2014/main" id="{06D4F575-BBE5-2024-FB90-9D74FD3E9EC5}"/>
+                <a16:creationId xmlns:a16="http://schemas.microsoft.com/office/drawing/2014/main" id="{03E75CD8-957D-A890-6869-F9595250A862}"/>
               </a:ext>
             </a:extLst>
           </p:cNvPr>
@@ -2232,7 +2232,7 @@
           <a:bodyPr/>
           <a:lstStyle/>
           <a:p>
-            <a:fld id="{921E9C66-043B-4641-BE1D-DB0300241785}" type="slidenum">
+            <a:fld id="{2424C583-414A-4C59-9A3C-B49240DB116E}" type="slidenum">
               <a:rPr kumimoji="1" lang="ja-JP" altLang="en-US" smtClean="0"/>
               <a:t>‹#›</a:t>
             </a:fld>
@@ -2243,7 +2243,7 @@
     </p:spTree>
     <p:extLst>
       <p:ext uri="{BB962C8B-B14F-4D97-AF65-F5344CB8AC3E}">
-        <p14:creationId xmlns:p14="http://schemas.microsoft.com/office/powerpoint/2010/main" val="1174814259"/>
+        <p14:creationId xmlns:p14="http://schemas.microsoft.com/office/powerpoint/2010/main" val="1820949868"/>
       </p:ext>
     </p:extLst>
   </p:cSld>
@@ -2275,7 +2275,7 @@
           <p:cNvPr id="2" name="日付プレースホルダー 1">
             <a:extLst>
               <a:ext uri="{FF2B5EF4-FFF2-40B4-BE49-F238E27FC236}">
-                <a16:creationId xmlns:a16="http://schemas.microsoft.com/office/drawing/2014/main" id="{44C3DECC-FB33-62A7-8421-23AB0764F206}"/>
+                <a16:creationId xmlns:a16="http://schemas.microsoft.com/office/drawing/2014/main" id="{DAA1919F-2C30-E384-9E5F-B8289F2E9879}"/>
               </a:ext>
             </a:extLst>
           </p:cNvPr>
@@ -2291,7 +2291,7 @@
           <a:bodyPr/>
           <a:lstStyle/>
           <a:p>
-            <a:fld id="{2BA13DB1-F98E-4CB7-8E3C-022B5CE5E477}" type="datetimeFigureOut">
+            <a:fld id="{AD7249F9-574B-47D7-9E89-11B34E8CE952}" type="datetimeFigureOut">
               <a:rPr kumimoji="1" lang="ja-JP" altLang="en-US" smtClean="0"/>
               <a:t>2026/7/30</a:t>
             </a:fld>
@@ -2304,7 +2304,7 @@
           <p:cNvPr id="3" name="フッター プレースホルダー 2">
             <a:extLst>
               <a:ext uri="{FF2B5EF4-FFF2-40B4-BE49-F238E27FC236}">
-                <a16:creationId xmlns:a16="http://schemas.microsoft.com/office/drawing/2014/main" id="{5ED4F0B8-805A-3745-5AAF-549F3C1B289D}"/>
+                <a16:creationId xmlns:a16="http://schemas.microsoft.com/office/drawing/2014/main" id="{549AE556-7FC5-9724-1B45-90F29BB4D8C3}"/>
               </a:ext>
             </a:extLst>
           </p:cNvPr>
@@ -2329,7 +2329,7 @@
           <p:cNvPr id="4" name="スライド番号プレースホルダー 3">
             <a:extLst>
               <a:ext uri="{FF2B5EF4-FFF2-40B4-BE49-F238E27FC236}">
-                <a16:creationId xmlns:a16="http://schemas.microsoft.com/office/drawing/2014/main" id="{14A11387-40BB-A5B6-A973-920C86CFD212}"/>
+                <a16:creationId xmlns:a16="http://schemas.microsoft.com/office/drawing/2014/main" id="{2CF46454-1CE1-4501-6365-5E369B6A4ABE}"/>
               </a:ext>
             </a:extLst>
           </p:cNvPr>
@@ -2345,7 +2345,7 @@
           <a:bodyPr/>
           <a:lstStyle/>
           <a:p>
-            <a:fld id="{921E9C66-043B-4641-BE1D-DB0300241785}" type="slidenum">
+            <a:fld id="{2424C583-414A-4C59-9A3C-B49240DB116E}" type="slidenum">
               <a:rPr kumimoji="1" lang="ja-JP" altLang="en-US" smtClean="0"/>
               <a:t>‹#›</a:t>
             </a:fld>
@@ -2356,7 +2356,7 @@
     </p:spTree>
     <p:extLst>
       <p:ext uri="{BB962C8B-B14F-4D97-AF65-F5344CB8AC3E}">
-        <p14:creationId xmlns:p14="http://schemas.microsoft.com/office/powerpoint/2010/main" val="3292406856"/>
+        <p14:creationId xmlns:p14="http://schemas.microsoft.com/office/powerpoint/2010/main" val="1772549115"/>
       </p:ext>
     </p:extLst>
   </p:cSld>
@@ -2388,7 +2388,7 @@
           <p:cNvPr id="2" name="タイトル 1">
             <a:extLst>
               <a:ext uri="{FF2B5EF4-FFF2-40B4-BE49-F238E27FC236}">
-                <a16:creationId xmlns:a16="http://schemas.microsoft.com/office/drawing/2014/main" id="{38177552-AF73-C12F-6032-15439728858C}"/>
+                <a16:creationId xmlns:a16="http://schemas.microsoft.com/office/drawing/2014/main" id="{E261AF49-DA0C-8788-B699-80C77C9E5669}"/>
               </a:ext>
             </a:extLst>
           </p:cNvPr>
@@ -2425,7 +2425,7 @@
           <p:cNvPr id="3" name="コンテンツ プレースホルダー 2">
             <a:extLst>
               <a:ext uri="{FF2B5EF4-FFF2-40B4-BE49-F238E27FC236}">
-                <a16:creationId xmlns:a16="http://schemas.microsoft.com/office/drawing/2014/main" id="{B46164A4-3041-1905-5837-C0B3A936BFCD}"/>
+                <a16:creationId xmlns:a16="http://schemas.microsoft.com/office/drawing/2014/main" id="{1D829F98-E9F7-39B2-4584-2522BEC13C1F}"/>
               </a:ext>
             </a:extLst>
           </p:cNvPr>
@@ -2547,7 +2547,7 @@
           <p:cNvPr id="4" name="テキスト プレースホルダー 3">
             <a:extLst>
               <a:ext uri="{FF2B5EF4-FFF2-40B4-BE49-F238E27FC236}">
-                <a16:creationId xmlns:a16="http://schemas.microsoft.com/office/drawing/2014/main" id="{1AB39330-CFE6-4B01-1EB0-910B958EF05B}"/>
+                <a16:creationId xmlns:a16="http://schemas.microsoft.com/office/drawing/2014/main" id="{C348FFCA-5CEF-2C21-B735-30406944C2F6}"/>
               </a:ext>
             </a:extLst>
           </p:cNvPr>
@@ -2618,7 +2618,7 @@
           <p:cNvPr id="5" name="日付プレースホルダー 4">
             <a:extLst>
               <a:ext uri="{FF2B5EF4-FFF2-40B4-BE49-F238E27FC236}">
-                <a16:creationId xmlns:a16="http://schemas.microsoft.com/office/drawing/2014/main" id="{AC02BA6B-AA8A-AD34-8FB5-FEC31CD736F8}"/>
+                <a16:creationId xmlns:a16="http://schemas.microsoft.com/office/drawing/2014/main" id="{5D1F818F-B11B-B709-F790-F376754D677F}"/>
               </a:ext>
             </a:extLst>
           </p:cNvPr>
@@ -2634,7 +2634,7 @@
           <a:bodyPr/>
           <a:lstStyle/>
           <a:p>
-            <a:fld id="{2BA13DB1-F98E-4CB7-8E3C-022B5CE5E477}" type="datetimeFigureOut">
+            <a:fld id="{AD7249F9-574B-47D7-9E89-11B34E8CE952}" type="datetimeFigureOut">
               <a:rPr kumimoji="1" lang="ja-JP" altLang="en-US" smtClean="0"/>
               <a:t>2026/7/30</a:t>
             </a:fld>
@@ -2647,7 +2647,7 @@
           <p:cNvPr id="6" name="フッター プレースホルダー 5">
             <a:extLst>
               <a:ext uri="{FF2B5EF4-FFF2-40B4-BE49-F238E27FC236}">
-                <a16:creationId xmlns:a16="http://schemas.microsoft.com/office/drawing/2014/main" id="{1D48D263-2FD7-353A-F2A7-4107C671C3B7}"/>
+                <a16:creationId xmlns:a16="http://schemas.microsoft.com/office/drawing/2014/main" id="{3595B1CC-7110-0806-3DEB-6087BF00D9AD}"/>
               </a:ext>
             </a:extLst>
           </p:cNvPr>
@@ -2672,7 +2672,7 @@
           <p:cNvPr id="7" name="スライド番号プレースホルダー 6">
             <a:extLst>
               <a:ext uri="{FF2B5EF4-FFF2-40B4-BE49-F238E27FC236}">
-                <a16:creationId xmlns:a16="http://schemas.microsoft.com/office/drawing/2014/main" id="{DED60026-E1F5-F8F1-4D3A-C0D7BAE8F343}"/>
+                <a16:creationId xmlns:a16="http://schemas.microsoft.com/office/drawing/2014/main" id="{DC6D4460-1E64-E28D-9037-56F3459B8424}"/>
               </a:ext>
             </a:extLst>
           </p:cNvPr>
@@ -2688,7 +2688,7 @@
           <a:bodyPr/>
           <a:lstStyle/>
           <a:p>
-            <a:fld id="{921E9C66-043B-4641-BE1D-DB0300241785}" type="slidenum">
+            <a:fld id="{2424C583-414A-4C59-9A3C-B49240DB116E}" type="slidenum">
               <a:rPr kumimoji="1" lang="ja-JP" altLang="en-US" smtClean="0"/>
               <a:t>‹#›</a:t>
             </a:fld>
@@ -2699,7 +2699,7 @@
     </p:spTree>
     <p:extLst>
       <p:ext uri="{BB962C8B-B14F-4D97-AF65-F5344CB8AC3E}">
-        <p14:creationId xmlns:p14="http://schemas.microsoft.com/office/powerpoint/2010/main" val="1699928697"/>
+        <p14:creationId xmlns:p14="http://schemas.microsoft.com/office/powerpoint/2010/main" val="3374856931"/>
       </p:ext>
     </p:extLst>
   </p:cSld>
@@ -2731,7 +2731,7 @@
           <p:cNvPr id="2" name="タイトル 1">
             <a:extLst>
               <a:ext uri="{FF2B5EF4-FFF2-40B4-BE49-F238E27FC236}">
-                <a16:creationId xmlns:a16="http://schemas.microsoft.com/office/drawing/2014/main" id="{0BDA676A-39CC-9E1A-ADAA-209B040AC3E9}"/>
+                <a16:creationId xmlns:a16="http://schemas.microsoft.com/office/drawing/2014/main" id="{BC61D8E4-2D87-6806-1166-2E1B614FEFD8}"/>
               </a:ext>
             </a:extLst>
           </p:cNvPr>
@@ -2768,7 +2768,7 @@
           <p:cNvPr id="3" name="図プレースホルダー 2">
             <a:extLst>
               <a:ext uri="{FF2B5EF4-FFF2-40B4-BE49-F238E27FC236}">
-                <a16:creationId xmlns:a16="http://schemas.microsoft.com/office/drawing/2014/main" id="{0DD57E74-9E35-46AC-9D73-7ADC9E4300C0}"/>
+                <a16:creationId xmlns:a16="http://schemas.microsoft.com/office/drawing/2014/main" id="{F989A4E2-794C-1150-05A8-255DA26A8FC8}"/>
               </a:ext>
             </a:extLst>
           </p:cNvPr>
@@ -2835,7 +2835,7 @@
           <p:cNvPr id="4" name="テキスト プレースホルダー 3">
             <a:extLst>
               <a:ext uri="{FF2B5EF4-FFF2-40B4-BE49-F238E27FC236}">
-                <a16:creationId xmlns:a16="http://schemas.microsoft.com/office/drawing/2014/main" id="{BD5D8933-B8BB-1614-23F0-0B4DAF339717}"/>
+                <a16:creationId xmlns:a16="http://schemas.microsoft.com/office/drawing/2014/main" id="{E4BE922C-8825-72DA-92ED-34558BDD532D}"/>
               </a:ext>
             </a:extLst>
           </p:cNvPr>
@@ -2906,7 +2906,7 @@
           <p:cNvPr id="5" name="日付プレースホルダー 4">
             <a:extLst>
               <a:ext uri="{FF2B5EF4-FFF2-40B4-BE49-F238E27FC236}">
-                <a16:creationId xmlns:a16="http://schemas.microsoft.com/office/drawing/2014/main" id="{64A26866-278F-F113-0921-142A6D512941}"/>
+                <a16:creationId xmlns:a16="http://schemas.microsoft.com/office/drawing/2014/main" id="{960D8044-73CE-6014-23EA-48251C01544B}"/>
               </a:ext>
             </a:extLst>
           </p:cNvPr>
@@ -2922,7 +2922,7 @@
           <a:bodyPr/>
           <a:lstStyle/>
           <a:p>
-            <a:fld id="{2BA13DB1-F98E-4CB7-8E3C-022B5CE5E477}" type="datetimeFigureOut">
+            <a:fld id="{AD7249F9-574B-47D7-9E89-11B34E8CE952}" type="datetimeFigureOut">
               <a:rPr kumimoji="1" lang="ja-JP" altLang="en-US" smtClean="0"/>
               <a:t>2026/7/30</a:t>
             </a:fld>
@@ -2935,7 +2935,7 @@
           <p:cNvPr id="6" name="フッター プレースホルダー 5">
             <a:extLst>
               <a:ext uri="{FF2B5EF4-FFF2-40B4-BE49-F238E27FC236}">
-                <a16:creationId xmlns:a16="http://schemas.microsoft.com/office/drawing/2014/main" id="{2DF7F12E-63AD-C906-DC3B-40266C2C1652}"/>
+                <a16:creationId xmlns:a16="http://schemas.microsoft.com/office/drawing/2014/main" id="{B62DD2B5-6ED2-1BE7-3E04-5D0549A20407}"/>
               </a:ext>
             </a:extLst>
           </p:cNvPr>
@@ -2960,7 +2960,7 @@
           <p:cNvPr id="7" name="スライド番号プレースホルダー 6">
             <a:extLst>
               <a:ext uri="{FF2B5EF4-FFF2-40B4-BE49-F238E27FC236}">
-                <a16:creationId xmlns:a16="http://schemas.microsoft.com/office/drawing/2014/main" id="{6FC10AB1-51C1-447D-204B-07BE2258C462}"/>
+                <a16:creationId xmlns:a16="http://schemas.microsoft.com/office/drawing/2014/main" id="{8D68F049-AFBD-8502-FAF2-6675530F5AE0}"/>
               </a:ext>
             </a:extLst>
           </p:cNvPr>
@@ -2976,7 +2976,7 @@
           <a:bodyPr/>
           <a:lstStyle/>
           <a:p>
-            <a:fld id="{921E9C66-043B-4641-BE1D-DB0300241785}" type="slidenum">
+            <a:fld id="{2424C583-414A-4C59-9A3C-B49240DB116E}" type="slidenum">
               <a:rPr kumimoji="1" lang="ja-JP" altLang="en-US" smtClean="0"/>
               <a:t>‹#›</a:t>
             </a:fld>
@@ -2987,7 +2987,7 @@
     </p:spTree>
     <p:extLst>
       <p:ext uri="{BB962C8B-B14F-4D97-AF65-F5344CB8AC3E}">
-        <p14:creationId xmlns:p14="http://schemas.microsoft.com/office/powerpoint/2010/main" val="1966815337"/>
+        <p14:creationId xmlns:p14="http://schemas.microsoft.com/office/powerpoint/2010/main" val="1673224571"/>
       </p:ext>
     </p:extLst>
   </p:cSld>
@@ -3024,7 +3024,7 @@
           <p:cNvPr id="2" name="タイトル プレースホルダー 1">
             <a:extLst>
               <a:ext uri="{FF2B5EF4-FFF2-40B4-BE49-F238E27FC236}">
-                <a16:creationId xmlns:a16="http://schemas.microsoft.com/office/drawing/2014/main" id="{24C707E9-DECC-4DA5-F2B0-BE50F01395C7}"/>
+                <a16:creationId xmlns:a16="http://schemas.microsoft.com/office/drawing/2014/main" id="{B7778CB3-4C72-DDB4-09FB-59A48DFC900D}"/>
               </a:ext>
             </a:extLst>
           </p:cNvPr>
@@ -3062,7 +3062,7 @@
           <p:cNvPr id="3" name="テキスト プレースホルダー 2">
             <a:extLst>
               <a:ext uri="{FF2B5EF4-FFF2-40B4-BE49-F238E27FC236}">
-                <a16:creationId xmlns:a16="http://schemas.microsoft.com/office/drawing/2014/main" id="{904281C8-3B37-3D63-2D31-A7B7A7872AF4}"/>
+                <a16:creationId xmlns:a16="http://schemas.microsoft.com/office/drawing/2014/main" id="{6B978311-7C72-2682-FF82-DF484E0B0D25}"/>
               </a:ext>
             </a:extLst>
           </p:cNvPr>
@@ -3161,7 +3161,7 @@
           <p:cNvPr id="4" name="日付プレースホルダー 3">
             <a:extLst>
               <a:ext uri="{FF2B5EF4-FFF2-40B4-BE49-F238E27FC236}">
-                <a16:creationId xmlns:a16="http://schemas.microsoft.com/office/drawing/2014/main" id="{6E063490-AF69-E472-962E-C67E2DD841F3}"/>
+                <a16:creationId xmlns:a16="http://schemas.microsoft.com/office/drawing/2014/main" id="{64D238BC-B30C-B71A-BD45-41D45D91406E}"/>
               </a:ext>
             </a:extLst>
           </p:cNvPr>
@@ -3195,7 +3195,7 @@
             </a:lvl1pPr>
           </a:lstStyle>
           <a:p>
-            <a:fld id="{2BA13DB1-F98E-4CB7-8E3C-022B5CE5E477}" type="datetimeFigureOut">
+            <a:fld id="{AD7249F9-574B-47D7-9E89-11B34E8CE952}" type="datetimeFigureOut">
               <a:rPr kumimoji="1" lang="ja-JP" altLang="en-US" smtClean="0"/>
               <a:t>2026/7/30</a:t>
             </a:fld>
@@ -3208,7 +3208,7 @@
           <p:cNvPr id="5" name="フッター プレースホルダー 4">
             <a:extLst>
               <a:ext uri="{FF2B5EF4-FFF2-40B4-BE49-F238E27FC236}">
-                <a16:creationId xmlns:a16="http://schemas.microsoft.com/office/drawing/2014/main" id="{B3A4AE4B-4D40-A64C-DCA6-EE355198AD93}"/>
+                <a16:creationId xmlns:a16="http://schemas.microsoft.com/office/drawing/2014/main" id="{22F9BCDA-3FA3-55D1-1976-FC0DF503371E}"/>
               </a:ext>
             </a:extLst>
           </p:cNvPr>
@@ -3251,7 +3251,7 @@
           <p:cNvPr id="6" name="スライド番号プレースホルダー 5">
             <a:extLst>
               <a:ext uri="{FF2B5EF4-FFF2-40B4-BE49-F238E27FC236}">
-                <a16:creationId xmlns:a16="http://schemas.microsoft.com/office/drawing/2014/main" id="{D7882138-C77A-F94D-FEC9-AF7C5C17E00E}"/>
+                <a16:creationId xmlns:a16="http://schemas.microsoft.com/office/drawing/2014/main" id="{535A627B-0320-0F5A-A33C-5C5F9A30EE0B}"/>
               </a:ext>
             </a:extLst>
           </p:cNvPr>
@@ -3285,7 +3285,7 @@
             </a:lvl1pPr>
           </a:lstStyle>
           <a:p>
-            <a:fld id="{921E9C66-043B-4641-BE1D-DB0300241785}" type="slidenum">
+            <a:fld id="{2424C583-414A-4C59-9A3C-B49240DB116E}" type="slidenum">
               <a:rPr kumimoji="1" lang="ja-JP" altLang="en-US" smtClean="0"/>
               <a:t>‹#›</a:t>
             </a:fld>
@@ -3296,7 +3296,7 @@
     </p:spTree>
     <p:extLst>
       <p:ext uri="{BB962C8B-B14F-4D97-AF65-F5344CB8AC3E}">
-        <p14:creationId xmlns:p14="http://schemas.microsoft.com/office/powerpoint/2010/main" val="4012972749"/>
+        <p14:creationId xmlns:p14="http://schemas.microsoft.com/office/powerpoint/2010/main" val="3545648402"/>
       </p:ext>
     </p:extLst>
   </p:cSld>
@@ -3619,7 +3619,7 @@
           <p:cNvPr id="2" name="テキスト ボックス 1">
             <a:extLst>
               <a:ext uri="{FF2B5EF4-FFF2-40B4-BE49-F238E27FC236}">
-                <a16:creationId xmlns:a16="http://schemas.microsoft.com/office/drawing/2014/main" id="{9677EA9B-90BF-5E8F-15F1-7452081FBFF7}"/>
+                <a16:creationId xmlns:a16="http://schemas.microsoft.com/office/drawing/2014/main" id="{4CD63338-F4D3-513D-9281-86CB871FAA79}"/>
               </a:ext>
             </a:extLst>
           </p:cNvPr>
@@ -3665,7 +3665,7 @@
           <p:cNvPr id="3" name="テキスト ボックス 2">
             <a:extLst>
               <a:ext uri="{FF2B5EF4-FFF2-40B4-BE49-F238E27FC236}">
-                <a16:creationId xmlns:a16="http://schemas.microsoft.com/office/drawing/2014/main" id="{514C7F13-D025-B0F7-AA21-ECA55765E026}"/>
+                <a16:creationId xmlns:a16="http://schemas.microsoft.com/office/drawing/2014/main" id="{A274214D-0A5D-7167-357D-C192E4607166}"/>
               </a:ext>
             </a:extLst>
           </p:cNvPr>
@@ -3714,7 +3714,7 @@
           <p:cNvPr id="4" name="テキスト ボックス 3">
             <a:extLst>
               <a:ext uri="{FF2B5EF4-FFF2-40B4-BE49-F238E27FC236}">
-                <a16:creationId xmlns:a16="http://schemas.microsoft.com/office/drawing/2014/main" id="{92095C9D-3495-AABD-E5BF-2963B88428E5}"/>
+                <a16:creationId xmlns:a16="http://schemas.microsoft.com/office/drawing/2014/main" id="{829055E6-5BD3-4F2D-F847-17E265CFE359}"/>
               </a:ext>
             </a:extLst>
           </p:cNvPr>
@@ -3754,7 +3754,7 @@
           <p:cNvPr id="5" name="テキスト ボックス 4">
             <a:extLst>
               <a:ext uri="{FF2B5EF4-FFF2-40B4-BE49-F238E27FC236}">
-                <a16:creationId xmlns:a16="http://schemas.microsoft.com/office/drawing/2014/main" id="{F4355473-FDE9-98A0-2B2A-2757EF91B643}"/>
+                <a16:creationId xmlns:a16="http://schemas.microsoft.com/office/drawing/2014/main" id="{A8F286DA-129F-670A-01DB-5D3AF17E7DB7}"/>
               </a:ext>
             </a:extLst>
           </p:cNvPr>
@@ -3801,7 +3801,7 @@
             <a:hlinkClick r:id="" action="ppaction://media"/>
             <a:extLst>
               <a:ext uri="{FF2B5EF4-FFF2-40B4-BE49-F238E27FC236}">
-                <a16:creationId xmlns:a16="http://schemas.microsoft.com/office/drawing/2014/main" id="{3723D6A2-FB33-4E90-FC26-298760EA4507}"/>
+                <a16:creationId xmlns:a16="http://schemas.microsoft.com/office/drawing/2014/main" id="{A75A4775-ED47-DA14-9876-E23C7040ED6F}"/>
               </a:ext>
             </a:extLst>
           </p:cNvPr>
@@ -3836,7 +3836,7 @@
     </p:spTree>
     <p:extLst>
       <p:ext uri="{BB962C8B-B14F-4D97-AF65-F5344CB8AC3E}">
-        <p14:creationId xmlns:p14="http://schemas.microsoft.com/office/powerpoint/2010/main" val="2012064477"/>
+        <p14:creationId xmlns:p14="http://schemas.microsoft.com/office/powerpoint/2010/main" val="2598545097"/>
       </p:ext>
     </p:extLst>
   </p:cSld>
@@ -3960,7 +3960,7 @@
           <p:cNvPr id="2" name="テキスト ボックス 1">
             <a:extLst>
               <a:ext uri="{FF2B5EF4-FFF2-40B4-BE49-F238E27FC236}">
-                <a16:creationId xmlns:a16="http://schemas.microsoft.com/office/drawing/2014/main" id="{86AD8F71-C0A0-0D45-A7D5-1F917B142B48}"/>
+                <a16:creationId xmlns:a16="http://schemas.microsoft.com/office/drawing/2014/main" id="{1ACE12CE-3FB9-3EDE-9D40-EF7094B6145D}"/>
               </a:ext>
             </a:extLst>
           </p:cNvPr>
@@ -4006,7 +4006,7 @@
           <p:cNvPr id="3" name="テキスト ボックス 2">
             <a:extLst>
               <a:ext uri="{FF2B5EF4-FFF2-40B4-BE49-F238E27FC236}">
-                <a16:creationId xmlns:a16="http://schemas.microsoft.com/office/drawing/2014/main" id="{7080F473-51FB-411D-BA7F-05C8A8FA2886}"/>
+                <a16:creationId xmlns:a16="http://schemas.microsoft.com/office/drawing/2014/main" id="{21FC962E-E7AB-5F49-E406-DD9E68E82757}"/>
               </a:ext>
             </a:extLst>
           </p:cNvPr>
@@ -4046,7 +4046,7 @@
           <p:cNvPr id="4" name="テキスト ボックス 3">
             <a:extLst>
               <a:ext uri="{FF2B5EF4-FFF2-40B4-BE49-F238E27FC236}">
-                <a16:creationId xmlns:a16="http://schemas.microsoft.com/office/drawing/2014/main" id="{A4E84F20-81C5-318E-8360-F360974E9A80}"/>
+                <a16:creationId xmlns:a16="http://schemas.microsoft.com/office/drawing/2014/main" id="{EDF2BC47-F8D7-F6EA-736B-15F95946FAB5}"/>
               </a:ext>
             </a:extLst>
           </p:cNvPr>
@@ -4110,7 +4110,7 @@
           <p:cNvPr id="5" name="テキスト ボックス 4">
             <a:extLst>
               <a:ext uri="{FF2B5EF4-FFF2-40B4-BE49-F238E27FC236}">
-                <a16:creationId xmlns:a16="http://schemas.microsoft.com/office/drawing/2014/main" id="{D09946F8-50D3-F7A0-00F9-262E215574D8}"/>
+                <a16:creationId xmlns:a16="http://schemas.microsoft.com/office/drawing/2014/main" id="{014D82F7-1297-0BE1-AB16-5C03EF564597}"/>
               </a:ext>
             </a:extLst>
           </p:cNvPr>
@@ -4157,7 +4157,7 @@
             <a:hlinkClick r:id="" action="ppaction://media"/>
             <a:extLst>
               <a:ext uri="{FF2B5EF4-FFF2-40B4-BE49-F238E27FC236}">
-                <a16:creationId xmlns:a16="http://schemas.microsoft.com/office/drawing/2014/main" id="{E7BD650F-463F-B769-5390-B9D90DFBDEE4}"/>
+                <a16:creationId xmlns:a16="http://schemas.microsoft.com/office/drawing/2014/main" id="{B6A2286B-A757-B610-5455-CD79FE22073A}"/>
               </a:ext>
             </a:extLst>
           </p:cNvPr>
@@ -4192,7 +4192,7 @@
     </p:spTree>
     <p:extLst>
       <p:ext uri="{BB962C8B-B14F-4D97-AF65-F5344CB8AC3E}">
-        <p14:creationId xmlns:p14="http://schemas.microsoft.com/office/powerpoint/2010/main" val="4257646016"/>
+        <p14:creationId xmlns:p14="http://schemas.microsoft.com/office/powerpoint/2010/main" val="691145048"/>
       </p:ext>
     </p:extLst>
   </p:cSld>
@@ -4316,7 +4316,7 @@
           <p:cNvPr id="2" name="テキスト ボックス 1">
             <a:extLst>
               <a:ext uri="{FF2B5EF4-FFF2-40B4-BE49-F238E27FC236}">
-                <a16:creationId xmlns:a16="http://schemas.microsoft.com/office/drawing/2014/main" id="{0ED75973-B904-3659-DAD5-BFF1A2453CCF}"/>
+                <a16:creationId xmlns:a16="http://schemas.microsoft.com/office/drawing/2014/main" id="{21E1B2FB-5EDA-EDA6-72EB-C6FE208E32F4}"/>
               </a:ext>
             </a:extLst>
           </p:cNvPr>
@@ -4362,7 +4362,7 @@
           <p:cNvPr id="3" name="テキスト ボックス 2">
             <a:extLst>
               <a:ext uri="{FF2B5EF4-FFF2-40B4-BE49-F238E27FC236}">
-                <a16:creationId xmlns:a16="http://schemas.microsoft.com/office/drawing/2014/main" id="{13399AF3-64A4-5960-A7DD-4F06A1B2C651}"/>
+                <a16:creationId xmlns:a16="http://schemas.microsoft.com/office/drawing/2014/main" id="{A6A477B5-5963-015A-BC45-957F6DAF5859}"/>
               </a:ext>
             </a:extLst>
           </p:cNvPr>
@@ -4402,7 +4402,7 @@
           <p:cNvPr id="4" name="テキスト ボックス 3">
             <a:extLst>
               <a:ext uri="{FF2B5EF4-FFF2-40B4-BE49-F238E27FC236}">
-                <a16:creationId xmlns:a16="http://schemas.microsoft.com/office/drawing/2014/main" id="{03E6F363-FD99-8CC3-E70B-3D22059B49DC}"/>
+                <a16:creationId xmlns:a16="http://schemas.microsoft.com/office/drawing/2014/main" id="{A9BEBF70-1735-98E4-4050-7A3BCFE07938}"/>
               </a:ext>
             </a:extLst>
           </p:cNvPr>
@@ -4497,7 +4497,7 @@
           <p:cNvPr id="5" name="テキスト ボックス 4">
             <a:extLst>
               <a:ext uri="{FF2B5EF4-FFF2-40B4-BE49-F238E27FC236}">
-                <a16:creationId xmlns:a16="http://schemas.microsoft.com/office/drawing/2014/main" id="{51367A2F-4BFE-6736-1F4F-B3BABA26BF81}"/>
+                <a16:creationId xmlns:a16="http://schemas.microsoft.com/office/drawing/2014/main" id="{512617DB-950C-D2EF-982C-85AC850F5FFF}"/>
               </a:ext>
             </a:extLst>
           </p:cNvPr>
@@ -4544,7 +4544,7 @@
             <a:hlinkClick r:id="" action="ppaction://media"/>
             <a:extLst>
               <a:ext uri="{FF2B5EF4-FFF2-40B4-BE49-F238E27FC236}">
-                <a16:creationId xmlns:a16="http://schemas.microsoft.com/office/drawing/2014/main" id="{990139D3-C87A-3F60-5942-E44342E76BB9}"/>
+                <a16:creationId xmlns:a16="http://schemas.microsoft.com/office/drawing/2014/main" id="{1F02AD37-2305-3561-C77C-921E807C4776}"/>
               </a:ext>
             </a:extLst>
           </p:cNvPr>
@@ -4579,7 +4579,7 @@
     </p:spTree>
     <p:extLst>
       <p:ext uri="{BB962C8B-B14F-4D97-AF65-F5344CB8AC3E}">
-        <p14:creationId xmlns:p14="http://schemas.microsoft.com/office/powerpoint/2010/main" val="3892836024"/>
+        <p14:creationId xmlns:p14="http://schemas.microsoft.com/office/powerpoint/2010/main" val="3069800746"/>
       </p:ext>
     </p:extLst>
   </p:cSld>
@@ -4703,7 +4703,7 @@
           <p:cNvPr id="2" name="テキスト ボックス 1">
             <a:extLst>
               <a:ext uri="{FF2B5EF4-FFF2-40B4-BE49-F238E27FC236}">
-                <a16:creationId xmlns:a16="http://schemas.microsoft.com/office/drawing/2014/main" id="{C92CF767-69BE-C2CB-7FB9-847EF9EFCDE9}"/>
+                <a16:creationId xmlns:a16="http://schemas.microsoft.com/office/drawing/2014/main" id="{93554AE9-EF3F-EA05-CE92-7D7493CC18DB}"/>
               </a:ext>
             </a:extLst>
           </p:cNvPr>
@@ -4749,7 +4749,7 @@
           <p:cNvPr id="3" name="テキスト ボックス 2">
             <a:extLst>
               <a:ext uri="{FF2B5EF4-FFF2-40B4-BE49-F238E27FC236}">
-                <a16:creationId xmlns:a16="http://schemas.microsoft.com/office/drawing/2014/main" id="{8A792D7F-1605-0CCA-9E22-5A8CDB806F6A}"/>
+                <a16:creationId xmlns:a16="http://schemas.microsoft.com/office/drawing/2014/main" id="{648B609C-9611-E8D6-1471-09BD56AA8986}"/>
               </a:ext>
             </a:extLst>
           </p:cNvPr>
@@ -4789,7 +4789,7 @@
           <p:cNvPr id="4" name="テキスト ボックス 3">
             <a:extLst>
               <a:ext uri="{FF2B5EF4-FFF2-40B4-BE49-F238E27FC236}">
-                <a16:creationId xmlns:a16="http://schemas.microsoft.com/office/drawing/2014/main" id="{07D68C81-AE5F-D4F9-22F2-F637C99CC363}"/>
+                <a16:creationId xmlns:a16="http://schemas.microsoft.com/office/drawing/2014/main" id="{BD76E100-14E9-1981-70F7-B5DE67D92597}"/>
               </a:ext>
             </a:extLst>
           </p:cNvPr>
@@ -4899,7 +4899,7 @@
           <p:cNvPr id="5" name="テキスト ボックス 4">
             <a:extLst>
               <a:ext uri="{FF2B5EF4-FFF2-40B4-BE49-F238E27FC236}">
-                <a16:creationId xmlns:a16="http://schemas.microsoft.com/office/drawing/2014/main" id="{A83E5B61-768B-3234-7FCD-4888BB3DF2BE}"/>
+                <a16:creationId xmlns:a16="http://schemas.microsoft.com/office/drawing/2014/main" id="{B4DA7352-190D-1557-FACE-C50B8A5A33C8}"/>
               </a:ext>
             </a:extLst>
           </p:cNvPr>
@@ -4946,7 +4946,7 @@
             <a:hlinkClick r:id="" action="ppaction://media"/>
             <a:extLst>
               <a:ext uri="{FF2B5EF4-FFF2-40B4-BE49-F238E27FC236}">
-                <a16:creationId xmlns:a16="http://schemas.microsoft.com/office/drawing/2014/main" id="{AFC3A845-0FBF-775A-DB37-069E3ADD5F9D}"/>
+                <a16:creationId xmlns:a16="http://schemas.microsoft.com/office/drawing/2014/main" id="{6EF4352D-1874-A8BC-AF59-BE97CF1D11F6}"/>
               </a:ext>
             </a:extLst>
           </p:cNvPr>
@@ -4981,7 +4981,7 @@
     </p:spTree>
     <p:extLst>
       <p:ext uri="{BB962C8B-B14F-4D97-AF65-F5344CB8AC3E}">
-        <p14:creationId xmlns:p14="http://schemas.microsoft.com/office/powerpoint/2010/main" val="3925218469"/>
+        <p14:creationId xmlns:p14="http://schemas.microsoft.com/office/powerpoint/2010/main" val="2504021729"/>
       </p:ext>
     </p:extLst>
   </p:cSld>
@@ -5105,7 +5105,7 @@
           <p:cNvPr id="2" name="テキスト ボックス 1">
             <a:extLst>
               <a:ext uri="{FF2B5EF4-FFF2-40B4-BE49-F238E27FC236}">
-                <a16:creationId xmlns:a16="http://schemas.microsoft.com/office/drawing/2014/main" id="{D8333275-084A-5134-0F76-403881C1A905}"/>
+                <a16:creationId xmlns:a16="http://schemas.microsoft.com/office/drawing/2014/main" id="{07460275-A8E0-51F5-2439-2FE4E22C8E60}"/>
               </a:ext>
             </a:extLst>
           </p:cNvPr>
@@ -5151,7 +5151,7 @@
           <p:cNvPr id="3" name="テキスト ボックス 2">
             <a:extLst>
               <a:ext uri="{FF2B5EF4-FFF2-40B4-BE49-F238E27FC236}">
-                <a16:creationId xmlns:a16="http://schemas.microsoft.com/office/drawing/2014/main" id="{E31D4224-B2A3-5674-C874-90BA81B1D45F}"/>
+                <a16:creationId xmlns:a16="http://schemas.microsoft.com/office/drawing/2014/main" id="{15EE6039-5697-F8E3-E2BD-92513184190F}"/>
               </a:ext>
             </a:extLst>
           </p:cNvPr>
@@ -5191,7 +5191,7 @@
           <p:cNvPr id="4" name="テキスト ボックス 3">
             <a:extLst>
               <a:ext uri="{FF2B5EF4-FFF2-40B4-BE49-F238E27FC236}">
-                <a16:creationId xmlns:a16="http://schemas.microsoft.com/office/drawing/2014/main" id="{32BC7D13-D5D5-4DA9-371C-58946C10E7C2}"/>
+                <a16:creationId xmlns:a16="http://schemas.microsoft.com/office/drawing/2014/main" id="{56B63E4F-82B6-2258-FCFD-705A2CCFD835}"/>
               </a:ext>
             </a:extLst>
           </p:cNvPr>
@@ -5215,20 +5215,14 @@
           <a:lstStyle/>
           <a:p>
             <a:r>
-              <a:rPr kumimoji="1" lang="en-US" altLang="ja-JP" sz="2000">
+              <a:rPr kumimoji="1" lang="ja-JP" altLang="en-US" sz="2000">
                 <a:solidFill>
                   <a:srgbClr val="333333"/>
                 </a:solidFill>
                 <a:latin typeface="Arial" panose="020B0604020202020204" pitchFamily="34" charset="0"/>
               </a:rPr>
-              <a:t>Set confirmed custom domain</a:t>
-            </a:r>
-            <a:endParaRPr kumimoji="1" lang="ja-JP" altLang="en-US" sz="2000">
-              <a:solidFill>
-                <a:srgbClr val="333333"/>
-              </a:solidFill>
-              <a:latin typeface="Arial" panose="020B0604020202020204" pitchFamily="34" charset="0"/>
-            </a:endParaRPr>
+              <a:t>直近のコミットでは、実装の見直しと継続的な改善が行われました。</a:t>
+            </a:r>
           </a:p>
         </p:txBody>
       </p:sp>
@@ -5237,7 +5231,7 @@
           <p:cNvPr id="5" name="テキスト ボックス 4">
             <a:extLst>
               <a:ext uri="{FF2B5EF4-FFF2-40B4-BE49-F238E27FC236}">
-                <a16:creationId xmlns:a16="http://schemas.microsoft.com/office/drawing/2014/main" id="{7A9D3D49-F838-5F06-337E-30CFAE304A70}"/>
+                <a16:creationId xmlns:a16="http://schemas.microsoft.com/office/drawing/2014/main" id="{7B487F4A-B14B-AB97-04C5-1068C80EF347}"/>
               </a:ext>
             </a:extLst>
           </p:cNvPr>
@@ -5284,7 +5278,7 @@
             <a:hlinkClick r:id="" action="ppaction://media"/>
             <a:extLst>
               <a:ext uri="{FF2B5EF4-FFF2-40B4-BE49-F238E27FC236}">
-                <a16:creationId xmlns:a16="http://schemas.microsoft.com/office/drawing/2014/main" id="{9D08F2F7-5B6F-6717-B406-AD719A07970E}"/>
+                <a16:creationId xmlns:a16="http://schemas.microsoft.com/office/drawing/2014/main" id="{92F5FA75-7B86-B486-63CB-815C7E5F81DD}"/>
               </a:ext>
             </a:extLst>
           </p:cNvPr>
@@ -5319,7 +5313,7 @@
     </p:spTree>
     <p:extLst>
       <p:ext uri="{BB962C8B-B14F-4D97-AF65-F5344CB8AC3E}">
-        <p14:creationId xmlns:p14="http://schemas.microsoft.com/office/powerpoint/2010/main" val="3085171842"/>
+        <p14:creationId xmlns:p14="http://schemas.microsoft.com/office/powerpoint/2010/main" val="3136529260"/>
       </p:ext>
     </p:extLst>
   </p:cSld>
@@ -5362,7 +5356,7 @@
                                   <p:childTnLst>
                                     <p:cmd type="call" cmd="playFrom(0.0)">
                                       <p:cBhvr>
-                                        <p:cTn id="6" dur="6451" fill="hold"/>
+                                        <p:cTn id="6" dur="6076" fill="hold"/>
                                         <p:tgtEl>
                                           <p:spTgt spid="6"/>
                                         </p:tgtEl>
@@ -5443,7 +5437,7 @@
           <p:cNvPr id="2" name="テキスト ボックス 1">
             <a:extLst>
               <a:ext uri="{FF2B5EF4-FFF2-40B4-BE49-F238E27FC236}">
-                <a16:creationId xmlns:a16="http://schemas.microsoft.com/office/drawing/2014/main" id="{99F2009B-F32D-C1E7-D193-8B096968A3F5}"/>
+                <a16:creationId xmlns:a16="http://schemas.microsoft.com/office/drawing/2014/main" id="{CC7F7313-9166-C412-EDB7-CDACA8538C18}"/>
               </a:ext>
             </a:extLst>
           </p:cNvPr>
@@ -5489,7 +5483,7 @@
           <p:cNvPr id="3" name="テキスト ボックス 2">
             <a:extLst>
               <a:ext uri="{FF2B5EF4-FFF2-40B4-BE49-F238E27FC236}">
-                <a16:creationId xmlns:a16="http://schemas.microsoft.com/office/drawing/2014/main" id="{93318A16-6EF0-AB4B-9D2B-9228268C8A65}"/>
+                <a16:creationId xmlns:a16="http://schemas.microsoft.com/office/drawing/2014/main" id="{1CECB010-2467-BC48-BDFB-231822C53198}"/>
               </a:ext>
             </a:extLst>
           </p:cNvPr>
@@ -5529,7 +5523,7 @@
           <p:cNvPr id="4" name="テキスト ボックス 3">
             <a:extLst>
               <a:ext uri="{FF2B5EF4-FFF2-40B4-BE49-F238E27FC236}">
-                <a16:creationId xmlns:a16="http://schemas.microsoft.com/office/drawing/2014/main" id="{26A5E0C4-2CF1-23BD-EC58-4E3C813F9ADB}"/>
+                <a16:creationId xmlns:a16="http://schemas.microsoft.com/office/drawing/2014/main" id="{E2DD92AE-63DC-7D2C-5758-0F72B5B4BB01}"/>
               </a:ext>
             </a:extLst>
           </p:cNvPr>
@@ -5594,7 +5588,7 @@
           <p:cNvPr id="5" name="テキスト ボックス 4">
             <a:extLst>
               <a:ext uri="{FF2B5EF4-FFF2-40B4-BE49-F238E27FC236}">
-                <a16:creationId xmlns:a16="http://schemas.microsoft.com/office/drawing/2014/main" id="{B1CDD265-BCC3-5B4D-EB1F-44A2911E2935}"/>
+                <a16:creationId xmlns:a16="http://schemas.microsoft.com/office/drawing/2014/main" id="{BC29B684-7833-FE38-B669-8EF355912684}"/>
               </a:ext>
             </a:extLst>
           </p:cNvPr>
@@ -5641,7 +5635,7 @@
             <a:hlinkClick r:id="" action="ppaction://media"/>
             <a:extLst>
               <a:ext uri="{FF2B5EF4-FFF2-40B4-BE49-F238E27FC236}">
-                <a16:creationId xmlns:a16="http://schemas.microsoft.com/office/drawing/2014/main" id="{80480E9C-1F18-A904-FE08-4140D2EC10A1}"/>
+                <a16:creationId xmlns:a16="http://schemas.microsoft.com/office/drawing/2014/main" id="{3102CCA6-481A-87F4-AC9F-18C115AEA8D4}"/>
               </a:ext>
             </a:extLst>
           </p:cNvPr>
@@ -5676,7 +5670,7 @@
     </p:spTree>
     <p:extLst>
       <p:ext uri="{BB962C8B-B14F-4D97-AF65-F5344CB8AC3E}">
-        <p14:creationId xmlns:p14="http://schemas.microsoft.com/office/powerpoint/2010/main" val="2089726667"/>
+        <p14:creationId xmlns:p14="http://schemas.microsoft.com/office/powerpoint/2010/main" val="654446110"/>
       </p:ext>
     </p:extLst>
   </p:cSld>
